--- a/resources/slides/01_introduction.pptx
+++ b/resources/slides/01_introduction.pptx
@@ -216,7 +216,7 @@
           <a:p>
             <a:fld id="{523DD8EB-66AA-D143-9080-C3FD918374BF}" type="datetimeFigureOut">
               <a:rPr lang="en-US" smtClean="0"/>
-              <a:t>8/6/26</a:t>
+              <a:t>9/12/26</a:t>
             </a:fld>
             <a:endParaRPr lang="en-US"/>
           </a:p>
@@ -822,7 +822,7 @@
           <a:p>
             <a:fld id="{CC015439-64B1-CE4E-8D65-9A05746CEBEF}" type="datetimeFigureOut">
               <a:rPr lang="en-US" smtClean="0"/>
-              <a:t>8/5/26</a:t>
+              <a:t>9/12/26</a:t>
             </a:fld>
             <a:endParaRPr lang="en-US"/>
           </a:p>
@@ -1050,7 +1050,7 @@
           <a:p>
             <a:fld id="{CC015439-64B1-CE4E-8D65-9A05746CEBEF}" type="datetimeFigureOut">
               <a:rPr lang="en-US" smtClean="0"/>
-              <a:t>8/5/26</a:t>
+              <a:t>9/12/26</a:t>
             </a:fld>
             <a:endParaRPr lang="en-US"/>
           </a:p>
@@ -1315,7 +1315,7 @@
           <a:p>
             <a:fld id="{CC015439-64B1-CE4E-8D65-9A05746CEBEF}" type="datetimeFigureOut">
               <a:rPr lang="en-US" smtClean="0"/>
-              <a:t>8/5/26</a:t>
+              <a:t>9/12/26</a:t>
             </a:fld>
             <a:endParaRPr lang="en-US"/>
           </a:p>
@@ -1456,7 +1456,7 @@
           <a:p>
             <a:fld id="{CC015439-64B1-CE4E-8D65-9A05746CEBEF}" type="datetimeFigureOut">
               <a:rPr lang="en-US" smtClean="0"/>
-              <a:t>8/5/26</a:t>
+              <a:t>9/12/26</a:t>
             </a:fld>
             <a:endParaRPr lang="en-US"/>
           </a:p>
@@ -1659,7 +1659,7 @@
           <a:p>
             <a:fld id="{CC015439-64B1-CE4E-8D65-9A05746CEBEF}" type="datetimeFigureOut">
               <a:rPr lang="en-US" smtClean="0"/>
-              <a:t>8/5/26</a:t>
+              <a:t>9/12/26</a:t>
             </a:fld>
             <a:endParaRPr lang="en-US"/>
           </a:p>
@@ -2809,7 +2809,7 @@
         </p:blipFill>
         <p:spPr>
           <a:xfrm>
-            <a:off x="2695001" y="5322246"/>
+            <a:off x="811117" y="5322246"/>
             <a:ext cx="6801998" cy="677796"/>
           </a:xfrm>
           <a:prstGeom prst="rect">
@@ -2948,7 +2948,7 @@
         </p:nvSpPr>
         <p:spPr>
           <a:xfrm>
-            <a:off x="5839359" y="6045701"/>
+            <a:off x="3933441" y="6045701"/>
             <a:ext cx="513282" cy="338554"/>
           </a:xfrm>
           <a:prstGeom prst="rect">
@@ -2969,6 +2969,95 @@
                 <a:cs typeface="Calibri" panose="020F0502020204030204" pitchFamily="34" charset="0"/>
               </a:rPr>
               <a:t>ETH</a:t>
+            </a:r>
+          </a:p>
+        </p:txBody>
+      </p:sp>
+      <p:sp>
+        <p:nvSpPr>
+          <p:cNvPr id="3" name="Content Placeholder 2">
+            <a:extLst>
+              <a:ext uri="{FF2B5EF4-FFF2-40B4-BE49-F238E27FC236}">
+                <a16:creationId xmlns:a16="http://schemas.microsoft.com/office/drawing/2014/main" id="{977DB88B-49B3-5487-8962-98E7A98673C0}"/>
+              </a:ext>
+            </a:extLst>
+          </p:cNvPr>
+          <p:cNvSpPr>
+            <a:spLocks noGrp="1"/>
+          </p:cNvSpPr>
+          <p:nvPr>
+            <p:ph idx="1"/>
+          </p:nvPr>
+        </p:nvSpPr>
+        <p:spPr>
+          <a:xfrm>
+            <a:off x="8064349" y="3803573"/>
+            <a:ext cx="4108920" cy="2536665"/>
+          </a:xfrm>
+        </p:spPr>
+        <p:txBody>
+          <a:bodyPr>
+            <a:normAutofit lnSpcReduction="10000"/>
+          </a:bodyPr>
+          <a:lstStyle/>
+          <a:p>
+            <a:r>
+              <a:rPr lang="en-US" sz="2000" dirty="0"/>
+              <a:t>Host Addresses</a:t>
+            </a:r>
+          </a:p>
+          <a:p>
+            <a:pPr lvl="1"/>
+            <a:r>
+              <a:rPr lang="en-US" sz="1700" dirty="0"/>
+              <a:t>How we write them (for now)</a:t>
+            </a:r>
+          </a:p>
+          <a:p>
+            <a:pPr lvl="1"/>
+            <a:r>
+              <a:rPr lang="en-US" sz="1700" dirty="0"/>
+              <a:t>More details later</a:t>
+            </a:r>
+          </a:p>
+          <a:p>
+            <a:r>
+              <a:rPr lang="en-US" sz="2000" dirty="0"/>
+              <a:t>Ethernet (48 bits)</a:t>
+            </a:r>
+            <a:endParaRPr sz="2000" dirty="0"/>
+          </a:p>
+          <a:p>
+            <a:pPr lvl="1"/>
+            <a:r>
+              <a:rPr lang="en-US" sz="1600" dirty="0">
+                <a:latin typeface="Lucida Sans" panose="020B0602030504020204" pitchFamily="34" charset="77"/>
+              </a:rPr>
+              <a:t>6e:86:88:18:7d:39</a:t>
+            </a:r>
+          </a:p>
+          <a:p>
+            <a:r>
+              <a:rPr lang="en-US" sz="2000" dirty="0"/>
+              <a:t>IP (32 bits)</a:t>
+            </a:r>
+          </a:p>
+          <a:p>
+            <a:pPr lvl="1"/>
+            <a:r>
+              <a:rPr lang="en-US" sz="1600" dirty="0">
+                <a:latin typeface="Lucida Sans" panose="020B0602030504020204" pitchFamily="34" charset="77"/>
+              </a:rPr>
+              <a:t>128.112.155.172</a:t>
+            </a:r>
+          </a:p>
+          <a:p>
+            <a:pPr lvl="1"/>
+            <a:r>
+              <a:rPr lang="en-US" sz="1600" dirty="0">
+                <a:latin typeface="Lucida Sans" panose="020B0602030504020204" pitchFamily="34" charset="77"/>
+              </a:rPr>
+              <a:t>128.112.155.0/24</a:t>
             </a:r>
           </a:p>
         </p:txBody>
@@ -2983,6 +3072,341 @@
   <p:clrMapOvr>
     <a:masterClrMapping/>
   </p:clrMapOvr>
+  <p:timing>
+    <p:tnLst>
+      <p:par>
+        <p:cTn id="1" dur="indefinite" restart="never" nodeType="tmRoot">
+          <p:childTnLst>
+            <p:seq concurrent="1" nextAc="seek">
+              <p:cTn id="2" dur="indefinite" nodeType="mainSeq">
+                <p:childTnLst>
+                  <p:par>
+                    <p:cTn id="3" fill="hold">
+                      <p:stCondLst>
+                        <p:cond delay="indefinite"/>
+                      </p:stCondLst>
+                      <p:childTnLst>
+                        <p:par>
+                          <p:cTn id="4" fill="hold">
+                            <p:stCondLst>
+                              <p:cond delay="0"/>
+                            </p:stCondLst>
+                            <p:childTnLst>
+                              <p:par>
+                                <p:cTn id="5" presetID="1" presetClass="entr" presetSubtype="0" fill="hold" grpId="0" nodeType="clickEffect">
+                                  <p:stCondLst>
+                                    <p:cond delay="0"/>
+                                  </p:stCondLst>
+                                  <p:childTnLst>
+                                    <p:set>
+                                      <p:cBhvr>
+                                        <p:cTn id="6" dur="1" fill="hold">
+                                          <p:stCondLst>
+                                            <p:cond delay="0"/>
+                                          </p:stCondLst>
+                                        </p:cTn>
+                                        <p:tgtEl>
+                                          <p:spTgt spid="3">
+                                            <p:txEl>
+                                              <p:pRg st="0" end="0"/>
+                                            </p:txEl>
+                                          </p:spTgt>
+                                        </p:tgtEl>
+                                        <p:attrNameLst>
+                                          <p:attrName>style.visibility</p:attrName>
+                                        </p:attrNameLst>
+                                      </p:cBhvr>
+                                      <p:to>
+                                        <p:strVal val="visible"/>
+                                      </p:to>
+                                    </p:set>
+                                  </p:childTnLst>
+                                </p:cTn>
+                              </p:par>
+                              <p:par>
+                                <p:cTn id="7" presetID="1" presetClass="entr" presetSubtype="0" fill="hold" grpId="0" nodeType="withEffect">
+                                  <p:stCondLst>
+                                    <p:cond delay="0"/>
+                                  </p:stCondLst>
+                                  <p:childTnLst>
+                                    <p:set>
+                                      <p:cBhvr>
+                                        <p:cTn id="8" dur="1" fill="hold">
+                                          <p:stCondLst>
+                                            <p:cond delay="0"/>
+                                          </p:stCondLst>
+                                        </p:cTn>
+                                        <p:tgtEl>
+                                          <p:spTgt spid="3">
+                                            <p:txEl>
+                                              <p:pRg st="1" end="1"/>
+                                            </p:txEl>
+                                          </p:spTgt>
+                                        </p:tgtEl>
+                                        <p:attrNameLst>
+                                          <p:attrName>style.visibility</p:attrName>
+                                        </p:attrNameLst>
+                                      </p:cBhvr>
+                                      <p:to>
+                                        <p:strVal val="visible"/>
+                                      </p:to>
+                                    </p:set>
+                                  </p:childTnLst>
+                                </p:cTn>
+                              </p:par>
+                              <p:par>
+                                <p:cTn id="9" presetID="1" presetClass="entr" presetSubtype="0" fill="hold" grpId="0" nodeType="withEffect">
+                                  <p:stCondLst>
+                                    <p:cond delay="0"/>
+                                  </p:stCondLst>
+                                  <p:childTnLst>
+                                    <p:set>
+                                      <p:cBhvr>
+                                        <p:cTn id="10" dur="1" fill="hold">
+                                          <p:stCondLst>
+                                            <p:cond delay="0"/>
+                                          </p:stCondLst>
+                                        </p:cTn>
+                                        <p:tgtEl>
+                                          <p:spTgt spid="3">
+                                            <p:txEl>
+                                              <p:pRg st="2" end="2"/>
+                                            </p:txEl>
+                                          </p:spTgt>
+                                        </p:tgtEl>
+                                        <p:attrNameLst>
+                                          <p:attrName>style.visibility</p:attrName>
+                                        </p:attrNameLst>
+                                      </p:cBhvr>
+                                      <p:to>
+                                        <p:strVal val="visible"/>
+                                      </p:to>
+                                    </p:set>
+                                  </p:childTnLst>
+                                </p:cTn>
+                              </p:par>
+                            </p:childTnLst>
+                          </p:cTn>
+                        </p:par>
+                      </p:childTnLst>
+                    </p:cTn>
+                  </p:par>
+                  <p:par>
+                    <p:cTn id="11" fill="hold">
+                      <p:stCondLst>
+                        <p:cond delay="indefinite"/>
+                      </p:stCondLst>
+                      <p:childTnLst>
+                        <p:par>
+                          <p:cTn id="12" fill="hold">
+                            <p:stCondLst>
+                              <p:cond delay="0"/>
+                            </p:stCondLst>
+                            <p:childTnLst>
+                              <p:par>
+                                <p:cTn id="13" presetID="1" presetClass="entr" presetSubtype="0" fill="hold" grpId="0" nodeType="clickEffect">
+                                  <p:stCondLst>
+                                    <p:cond delay="0"/>
+                                  </p:stCondLst>
+                                  <p:childTnLst>
+                                    <p:set>
+                                      <p:cBhvr>
+                                        <p:cTn id="14" dur="1" fill="hold">
+                                          <p:stCondLst>
+                                            <p:cond delay="0"/>
+                                          </p:stCondLst>
+                                        </p:cTn>
+                                        <p:tgtEl>
+                                          <p:spTgt spid="3">
+                                            <p:txEl>
+                                              <p:pRg st="3" end="3"/>
+                                            </p:txEl>
+                                          </p:spTgt>
+                                        </p:tgtEl>
+                                        <p:attrNameLst>
+                                          <p:attrName>style.visibility</p:attrName>
+                                        </p:attrNameLst>
+                                      </p:cBhvr>
+                                      <p:to>
+                                        <p:strVal val="visible"/>
+                                      </p:to>
+                                    </p:set>
+                                  </p:childTnLst>
+                                </p:cTn>
+                              </p:par>
+                              <p:par>
+                                <p:cTn id="15" presetID="1" presetClass="entr" presetSubtype="0" fill="hold" grpId="0" nodeType="withEffect">
+                                  <p:stCondLst>
+                                    <p:cond delay="0"/>
+                                  </p:stCondLst>
+                                  <p:childTnLst>
+                                    <p:set>
+                                      <p:cBhvr>
+                                        <p:cTn id="16" dur="1" fill="hold">
+                                          <p:stCondLst>
+                                            <p:cond delay="0"/>
+                                          </p:stCondLst>
+                                        </p:cTn>
+                                        <p:tgtEl>
+                                          <p:spTgt spid="3">
+                                            <p:txEl>
+                                              <p:pRg st="4" end="4"/>
+                                            </p:txEl>
+                                          </p:spTgt>
+                                        </p:tgtEl>
+                                        <p:attrNameLst>
+                                          <p:attrName>style.visibility</p:attrName>
+                                        </p:attrNameLst>
+                                      </p:cBhvr>
+                                      <p:to>
+                                        <p:strVal val="visible"/>
+                                      </p:to>
+                                    </p:set>
+                                  </p:childTnLst>
+                                </p:cTn>
+                              </p:par>
+                            </p:childTnLst>
+                          </p:cTn>
+                        </p:par>
+                      </p:childTnLst>
+                    </p:cTn>
+                  </p:par>
+                  <p:par>
+                    <p:cTn id="17" fill="hold">
+                      <p:stCondLst>
+                        <p:cond delay="indefinite"/>
+                      </p:stCondLst>
+                      <p:childTnLst>
+                        <p:par>
+                          <p:cTn id="18" fill="hold">
+                            <p:stCondLst>
+                              <p:cond delay="0"/>
+                            </p:stCondLst>
+                            <p:childTnLst>
+                              <p:par>
+                                <p:cTn id="19" presetID="1" presetClass="entr" presetSubtype="0" fill="hold" grpId="0" nodeType="clickEffect">
+                                  <p:stCondLst>
+                                    <p:cond delay="0"/>
+                                  </p:stCondLst>
+                                  <p:childTnLst>
+                                    <p:set>
+                                      <p:cBhvr>
+                                        <p:cTn id="20" dur="1" fill="hold">
+                                          <p:stCondLst>
+                                            <p:cond delay="0"/>
+                                          </p:stCondLst>
+                                        </p:cTn>
+                                        <p:tgtEl>
+                                          <p:spTgt spid="3">
+                                            <p:txEl>
+                                              <p:pRg st="5" end="5"/>
+                                            </p:txEl>
+                                          </p:spTgt>
+                                        </p:tgtEl>
+                                        <p:attrNameLst>
+                                          <p:attrName>style.visibility</p:attrName>
+                                        </p:attrNameLst>
+                                      </p:cBhvr>
+                                      <p:to>
+                                        <p:strVal val="visible"/>
+                                      </p:to>
+                                    </p:set>
+                                  </p:childTnLst>
+                                </p:cTn>
+                              </p:par>
+                              <p:par>
+                                <p:cTn id="21" presetID="1" presetClass="entr" presetSubtype="0" fill="hold" grpId="0" nodeType="withEffect">
+                                  <p:stCondLst>
+                                    <p:cond delay="0"/>
+                                  </p:stCondLst>
+                                  <p:childTnLst>
+                                    <p:set>
+                                      <p:cBhvr>
+                                        <p:cTn id="22" dur="1" fill="hold">
+                                          <p:stCondLst>
+                                            <p:cond delay="0"/>
+                                          </p:stCondLst>
+                                        </p:cTn>
+                                        <p:tgtEl>
+                                          <p:spTgt spid="3">
+                                            <p:txEl>
+                                              <p:pRg st="6" end="6"/>
+                                            </p:txEl>
+                                          </p:spTgt>
+                                        </p:tgtEl>
+                                        <p:attrNameLst>
+                                          <p:attrName>style.visibility</p:attrName>
+                                        </p:attrNameLst>
+                                      </p:cBhvr>
+                                      <p:to>
+                                        <p:strVal val="visible"/>
+                                      </p:to>
+                                    </p:set>
+                                  </p:childTnLst>
+                                </p:cTn>
+                              </p:par>
+                              <p:par>
+                                <p:cTn id="23" presetID="1" presetClass="entr" presetSubtype="0" fill="hold" grpId="0" nodeType="withEffect">
+                                  <p:stCondLst>
+                                    <p:cond delay="0"/>
+                                  </p:stCondLst>
+                                  <p:childTnLst>
+                                    <p:set>
+                                      <p:cBhvr>
+                                        <p:cTn id="24" dur="1" fill="hold">
+                                          <p:stCondLst>
+                                            <p:cond delay="0"/>
+                                          </p:stCondLst>
+                                        </p:cTn>
+                                        <p:tgtEl>
+                                          <p:spTgt spid="3">
+                                            <p:txEl>
+                                              <p:pRg st="7" end="7"/>
+                                            </p:txEl>
+                                          </p:spTgt>
+                                        </p:tgtEl>
+                                        <p:attrNameLst>
+                                          <p:attrName>style.visibility</p:attrName>
+                                        </p:attrNameLst>
+                                      </p:cBhvr>
+                                      <p:to>
+                                        <p:strVal val="visible"/>
+                                      </p:to>
+                                    </p:set>
+                                  </p:childTnLst>
+                                </p:cTn>
+                              </p:par>
+                            </p:childTnLst>
+                          </p:cTn>
+                        </p:par>
+                      </p:childTnLst>
+                    </p:cTn>
+                  </p:par>
+                </p:childTnLst>
+              </p:cTn>
+              <p:prevCondLst>
+                <p:cond evt="onPrev" delay="0">
+                  <p:tgtEl>
+                    <p:sldTgt/>
+                  </p:tgtEl>
+                </p:cond>
+              </p:prevCondLst>
+              <p:nextCondLst>
+                <p:cond evt="onNext" delay="0">
+                  <p:tgtEl>
+                    <p:sldTgt/>
+                  </p:tgtEl>
+                </p:cond>
+              </p:nextCondLst>
+            </p:seq>
+          </p:childTnLst>
+        </p:cTn>
+      </p:par>
+    </p:tnLst>
+    <p:bldLst>
+      <p:bldP spid="3" grpId="0" build="p"/>
+    </p:bldLst>
+  </p:timing>
 </p:sld>
 </file>
 
@@ -4101,7 +4525,7 @@
         <p:spPr/>
         <p:txBody>
           <a:bodyPr>
-            <a:normAutofit fontScale="77500" lnSpcReduction="20000"/>
+            <a:normAutofit fontScale="85000" lnSpcReduction="10000"/>
           </a:bodyPr>
           <a:lstStyle/>
           <a:p>
@@ -4113,7 +4537,7 @@
             </a:pPr>
             <a:r>
               <a:rPr lang="en-US" i="1" dirty="0"/>
-              <a:t>Today’s Internet connects over 22 billion devices. Those devices are widely distributed across the planet (and in low orbit around the planet), where any one of them can send and receive messages with one or more of the other 22 billion devices. The network itself is a massively distributed system, built from hundreds of millions of switching devices. All of this is in the service of applications as diverse as video conferencing, live and on-demand streaming, e-commerce, social media, automated manufacturing.</a:t>
+              <a:t>Today’s Internet connects over 22 billion devices. The network itself is a massively distributed system, built from hundreds of millions of switching devices. All of this is in the service of applications as diverse as video conferencing, live and on-demand streaming, e-commerce, social media, automated manufacturing.</a:t>
             </a:r>
           </a:p>
           <a:p>
@@ -5569,7 +5993,7 @@
             <a:pPr lvl="2"/>
             <a:r>
               <a:rPr lang="en-US" dirty="0"/>
-              <a:t>Detect (and optionally “fix”) errors inside the network only as an optimization</a:t>
+              <a:t>Detect (and optionally “fix”) errors inside the network as an optimization</a:t>
             </a:r>
             <a:endParaRPr dirty="0"/>
           </a:p>

--- a/resources/slides/01_introduction.pptx
+++ b/resources/slides/01_introduction.pptx
@@ -216,7 +216,7 @@
           <a:p>
             <a:fld id="{523DD8EB-66AA-D143-9080-C3FD918374BF}" type="datetimeFigureOut">
               <a:rPr lang="en-US" smtClean="0"/>
-              <a:t>9/12/26</a:t>
+              <a:t>9/25/26</a:t>
             </a:fld>
             <a:endParaRPr lang="en-US"/>
           </a:p>
@@ -820,9 +820,9 @@
           <a:bodyPr/>
           <a:lstStyle/>
           <a:p>
-            <a:fld id="{CC015439-64B1-CE4E-8D65-9A05746CEBEF}" type="datetimeFigureOut">
+            <a:fld id="{227BA7B3-60B0-214C-811F-7160BA601FCE}" type="datetime1">
               <a:rPr lang="en-US" smtClean="0"/>
-              <a:t>9/12/26</a:t>
+              <a:t>9/25/26</a:t>
             </a:fld>
             <a:endParaRPr lang="en-US"/>
           </a:p>
@@ -849,7 +849,10 @@
           <a:bodyPr/>
           <a:lstStyle/>
           <a:p>
-            <a:endParaRPr lang="en-US"/>
+            <a:r>
+              <a:rPr lang="en-US"/>
+              <a:t>Copyright Peterson &amp; Davie, 2026</a:t>
+            </a:r>
           </a:p>
         </p:txBody>
       </p:sp>
@@ -1048,9 +1051,9 @@
           <a:bodyPr/>
           <a:lstStyle/>
           <a:p>
-            <a:fld id="{CC015439-64B1-CE4E-8D65-9A05746CEBEF}" type="datetimeFigureOut">
+            <a:fld id="{227133A9-06A4-D045-8AFE-F9462D640614}" type="datetime1">
               <a:rPr lang="en-US" smtClean="0"/>
-              <a:t>9/12/26</a:t>
+              <a:t>9/25/26</a:t>
             </a:fld>
             <a:endParaRPr lang="en-US"/>
           </a:p>
@@ -1077,7 +1080,10 @@
           <a:bodyPr/>
           <a:lstStyle/>
           <a:p>
-            <a:endParaRPr lang="en-US"/>
+            <a:r>
+              <a:rPr lang="en-US"/>
+              <a:t>Copyright Peterson &amp; Davie, 2026</a:t>
+            </a:r>
           </a:p>
         </p:txBody>
       </p:sp>
@@ -1313,9 +1319,9 @@
           <a:bodyPr/>
           <a:lstStyle/>
           <a:p>
-            <a:fld id="{CC015439-64B1-CE4E-8D65-9A05746CEBEF}" type="datetimeFigureOut">
+            <a:fld id="{8372B1F6-B064-3642-BFF8-8C3A7A6A5A0B}" type="datetime1">
               <a:rPr lang="en-US" smtClean="0"/>
-              <a:t>9/12/26</a:t>
+              <a:t>9/25/26</a:t>
             </a:fld>
             <a:endParaRPr lang="en-US"/>
           </a:p>
@@ -1342,7 +1348,10 @@
           <a:bodyPr/>
           <a:lstStyle/>
           <a:p>
-            <a:endParaRPr lang="en-US"/>
+            <a:r>
+              <a:rPr lang="en-US"/>
+              <a:t>Copyright Peterson &amp; Davie, 2026</a:t>
+            </a:r>
           </a:p>
         </p:txBody>
       </p:sp>
@@ -1454,9 +1463,9 @@
           <a:bodyPr/>
           <a:lstStyle/>
           <a:p>
-            <a:fld id="{CC015439-64B1-CE4E-8D65-9A05746CEBEF}" type="datetimeFigureOut">
+            <a:fld id="{8B7A3374-4AC0-D34A-9EDE-BFA8B498AC97}" type="datetime1">
               <a:rPr lang="en-US" smtClean="0"/>
-              <a:t>9/12/26</a:t>
+              <a:t>9/25/26</a:t>
             </a:fld>
             <a:endParaRPr lang="en-US"/>
           </a:p>
@@ -1483,7 +1492,10 @@
           <a:bodyPr/>
           <a:lstStyle/>
           <a:p>
-            <a:endParaRPr lang="en-US"/>
+            <a:r>
+              <a:rPr lang="en-US"/>
+              <a:t>Copyright Peterson &amp; Davie, 2026</a:t>
+            </a:r>
           </a:p>
         </p:txBody>
       </p:sp>
@@ -1657,9 +1669,9 @@
             </a:lvl1pPr>
           </a:lstStyle>
           <a:p>
-            <a:fld id="{CC015439-64B1-CE4E-8D65-9A05746CEBEF}" type="datetimeFigureOut">
+            <a:fld id="{26DB3171-1844-2F47-97EA-4A15C005B429}" type="datetime1">
               <a:rPr lang="en-US" smtClean="0"/>
-              <a:t>9/12/26</a:t>
+              <a:t>9/25/26</a:t>
             </a:fld>
             <a:endParaRPr lang="en-US"/>
           </a:p>
@@ -1704,7 +1716,10 @@
             </a:lvl1pPr>
           </a:lstStyle>
           <a:p>
-            <a:endParaRPr lang="en-US"/>
+            <a:r>
+              <a:rPr lang="en-US"/>
+              <a:t>Copyright Peterson &amp; Davie, 2026</a:t>
+            </a:r>
           </a:p>
         </p:txBody>
       </p:sp>
@@ -1859,6 +1874,7 @@
     <p:sldLayoutId id="2147483652" r:id="rId3"/>
     <p:sldLayoutId id="2147483654" r:id="rId4"/>
   </p:sldLayoutIdLst>
+  <p:hf sldNum="0" hdr="0" dt="0"/>
   <p:txStyles>
     <p:titleStyle>
       <a:lvl1pPr algn="l" defTabSz="914400" rtl="0" eaLnBrk="1" latinLnBrk="0" hangingPunct="1">
@@ -2204,6 +2220,34 @@
           </a:p>
         </p:txBody>
       </p:sp>
+      <p:sp>
+        <p:nvSpPr>
+          <p:cNvPr id="4" name="Footer Placeholder 3">
+            <a:extLst>
+              <a:ext uri="{FF2B5EF4-FFF2-40B4-BE49-F238E27FC236}">
+                <a16:creationId xmlns:a16="http://schemas.microsoft.com/office/drawing/2014/main" id="{A497755F-3BAB-878F-76B6-2A1846891CCB}"/>
+              </a:ext>
+            </a:extLst>
+          </p:cNvPr>
+          <p:cNvSpPr>
+            <a:spLocks noGrp="1"/>
+          </p:cNvSpPr>
+          <p:nvPr>
+            <p:ph type="ftr" sz="quarter" idx="11"/>
+          </p:nvPr>
+        </p:nvSpPr>
+        <p:spPr/>
+        <p:txBody>
+          <a:bodyPr/>
+          <a:lstStyle/>
+          <a:p>
+            <a:r>
+              <a:rPr lang="en-US"/>
+              <a:t>Copyright Peterson &amp; Davie, 2026</a:t>
+            </a:r>
+          </a:p>
+        </p:txBody>
+      </p:sp>
     </p:spTree>
   </p:cSld>
   <p:clrMapOvr>
@@ -2408,6 +2452,34 @@
           </a:prstGeom>
         </p:spPr>
       </p:pic>
+      <p:sp>
+        <p:nvSpPr>
+          <p:cNvPr id="5" name="Footer Placeholder 4">
+            <a:extLst>
+              <a:ext uri="{FF2B5EF4-FFF2-40B4-BE49-F238E27FC236}">
+                <a16:creationId xmlns:a16="http://schemas.microsoft.com/office/drawing/2014/main" id="{923E67D9-F5B5-62B6-3DEA-A787D2F160C5}"/>
+              </a:ext>
+            </a:extLst>
+          </p:cNvPr>
+          <p:cNvSpPr>
+            <a:spLocks noGrp="1"/>
+          </p:cNvSpPr>
+          <p:nvPr>
+            <p:ph type="ftr" sz="quarter" idx="11"/>
+          </p:nvPr>
+        </p:nvSpPr>
+        <p:spPr/>
+        <p:txBody>
+          <a:bodyPr/>
+          <a:lstStyle/>
+          <a:p>
+            <a:r>
+              <a:rPr lang="en-US"/>
+              <a:t>Copyright Peterson &amp; Davie, 2026</a:t>
+            </a:r>
+          </a:p>
+        </p:txBody>
+      </p:sp>
     </p:spTree>
   </p:cSld>
   <p:clrMapOvr>
@@ -2534,6 +2606,34 @@
           </a:prstGeom>
         </p:spPr>
       </p:pic>
+      <p:sp>
+        <p:nvSpPr>
+          <p:cNvPr id="5" name="Footer Placeholder 4">
+            <a:extLst>
+              <a:ext uri="{FF2B5EF4-FFF2-40B4-BE49-F238E27FC236}">
+                <a16:creationId xmlns:a16="http://schemas.microsoft.com/office/drawing/2014/main" id="{A72CAFBA-C0BA-092E-6650-94EB54EAE430}"/>
+              </a:ext>
+            </a:extLst>
+          </p:cNvPr>
+          <p:cNvSpPr>
+            <a:spLocks noGrp="1"/>
+          </p:cNvSpPr>
+          <p:nvPr>
+            <p:ph type="ftr" sz="quarter" idx="11"/>
+          </p:nvPr>
+        </p:nvSpPr>
+        <p:spPr/>
+        <p:txBody>
+          <a:bodyPr/>
+          <a:lstStyle/>
+          <a:p>
+            <a:r>
+              <a:rPr lang="en-US"/>
+              <a:t>Copyright Peterson &amp; Davie, 2026</a:t>
+            </a:r>
+          </a:p>
+        </p:txBody>
+      </p:sp>
     </p:spTree>
   </p:cSld>
   <p:clrMapOvr>
@@ -2644,6 +2744,34 @@
           </a:prstGeom>
         </p:spPr>
       </p:pic>
+      <p:sp>
+        <p:nvSpPr>
+          <p:cNvPr id="5" name="Footer Placeholder 4">
+            <a:extLst>
+              <a:ext uri="{FF2B5EF4-FFF2-40B4-BE49-F238E27FC236}">
+                <a16:creationId xmlns:a16="http://schemas.microsoft.com/office/drawing/2014/main" id="{D5A3194A-AE7F-C4ED-A113-493026222262}"/>
+              </a:ext>
+            </a:extLst>
+          </p:cNvPr>
+          <p:cNvSpPr>
+            <a:spLocks noGrp="1"/>
+          </p:cNvSpPr>
+          <p:nvPr>
+            <p:ph type="ftr" sz="quarter" idx="11"/>
+          </p:nvPr>
+        </p:nvSpPr>
+        <p:spPr/>
+        <p:txBody>
+          <a:bodyPr/>
+          <a:lstStyle/>
+          <a:p>
+            <a:r>
+              <a:rPr lang="en-US"/>
+              <a:t>Copyright Peterson &amp; Davie, 2026</a:t>
+            </a:r>
+          </a:p>
+        </p:txBody>
+      </p:sp>
     </p:spTree>
   </p:cSld>
   <p:clrMapOvr>
@@ -3058,6 +3186,34 @@
                 <a:latin typeface="Lucida Sans" panose="020B0602030504020204" pitchFamily="34" charset="77"/>
               </a:rPr>
               <a:t>128.112.155.0/24</a:t>
+            </a:r>
+          </a:p>
+        </p:txBody>
+      </p:sp>
+      <p:sp>
+        <p:nvSpPr>
+          <p:cNvPr id="4" name="Footer Placeholder 3">
+            <a:extLst>
+              <a:ext uri="{FF2B5EF4-FFF2-40B4-BE49-F238E27FC236}">
+                <a16:creationId xmlns:a16="http://schemas.microsoft.com/office/drawing/2014/main" id="{33C3128F-74A8-7A38-1E1A-5AC48C7FB5C2}"/>
+              </a:ext>
+            </a:extLst>
+          </p:cNvPr>
+          <p:cNvSpPr>
+            <a:spLocks noGrp="1"/>
+          </p:cNvSpPr>
+          <p:nvPr>
+            <p:ph type="ftr" sz="quarter" idx="11"/>
+          </p:nvPr>
+        </p:nvSpPr>
+        <p:spPr/>
+        <p:txBody>
+          <a:bodyPr/>
+          <a:lstStyle/>
+          <a:p>
+            <a:r>
+              <a:rPr lang="en-US"/>
+              <a:t>Copyright Peterson &amp; Davie, 2026</a:t>
             </a:r>
           </a:p>
         </p:txBody>
@@ -3520,6 +3676,34 @@
           </a:p>
         </p:txBody>
       </p:sp>
+      <p:sp>
+        <p:nvSpPr>
+          <p:cNvPr id="4" name="Footer Placeholder 3">
+            <a:extLst>
+              <a:ext uri="{FF2B5EF4-FFF2-40B4-BE49-F238E27FC236}">
+                <a16:creationId xmlns:a16="http://schemas.microsoft.com/office/drawing/2014/main" id="{2E82F8D4-4081-3F79-33A5-58A82C93DC34}"/>
+              </a:ext>
+            </a:extLst>
+          </p:cNvPr>
+          <p:cNvSpPr>
+            <a:spLocks noGrp="1"/>
+          </p:cNvSpPr>
+          <p:nvPr>
+            <p:ph type="ftr" sz="quarter" idx="11"/>
+          </p:nvPr>
+        </p:nvSpPr>
+        <p:spPr/>
+        <p:txBody>
+          <a:bodyPr/>
+          <a:lstStyle/>
+          <a:p>
+            <a:r>
+              <a:rPr lang="en-US"/>
+              <a:t>Copyright Peterson &amp; Davie, 2026</a:t>
+            </a:r>
+          </a:p>
+        </p:txBody>
+      </p:sp>
     </p:spTree>
   </p:cSld>
   <p:clrMapOvr>
@@ -3731,6 +3915,34 @@
           </a:prstGeom>
         </p:spPr>
       </p:pic>
+      <p:sp>
+        <p:nvSpPr>
+          <p:cNvPr id="5" name="Footer Placeholder 4">
+            <a:extLst>
+              <a:ext uri="{FF2B5EF4-FFF2-40B4-BE49-F238E27FC236}">
+                <a16:creationId xmlns:a16="http://schemas.microsoft.com/office/drawing/2014/main" id="{0CDEAE0C-5A90-74CB-6E58-41AEB37064CF}"/>
+              </a:ext>
+            </a:extLst>
+          </p:cNvPr>
+          <p:cNvSpPr>
+            <a:spLocks noGrp="1"/>
+          </p:cNvSpPr>
+          <p:nvPr>
+            <p:ph type="ftr" sz="quarter" idx="11"/>
+          </p:nvPr>
+        </p:nvSpPr>
+        <p:spPr/>
+        <p:txBody>
+          <a:bodyPr/>
+          <a:lstStyle/>
+          <a:p>
+            <a:r>
+              <a:rPr lang="en-US"/>
+              <a:t>Copyright Peterson &amp; Davie, 2026</a:t>
+            </a:r>
+          </a:p>
+        </p:txBody>
+      </p:sp>
     </p:spTree>
   </p:cSld>
   <p:clrMapOvr>
@@ -3900,6 +4112,34 @@
           </a:prstGeom>
         </p:spPr>
       </p:pic>
+      <p:sp>
+        <p:nvSpPr>
+          <p:cNvPr id="5" name="Footer Placeholder 4">
+            <a:extLst>
+              <a:ext uri="{FF2B5EF4-FFF2-40B4-BE49-F238E27FC236}">
+                <a16:creationId xmlns:a16="http://schemas.microsoft.com/office/drawing/2014/main" id="{CFB799D0-171F-97A7-08E5-34899885CEE3}"/>
+              </a:ext>
+            </a:extLst>
+          </p:cNvPr>
+          <p:cNvSpPr>
+            <a:spLocks noGrp="1"/>
+          </p:cNvSpPr>
+          <p:nvPr>
+            <p:ph type="ftr" sz="quarter" idx="11"/>
+          </p:nvPr>
+        </p:nvSpPr>
+        <p:spPr/>
+        <p:txBody>
+          <a:bodyPr/>
+          <a:lstStyle/>
+          <a:p>
+            <a:r>
+              <a:rPr lang="en-US"/>
+              <a:t>Copyright Peterson &amp; Davie, 2026</a:t>
+            </a:r>
+          </a:p>
+        </p:txBody>
+      </p:sp>
     </p:spTree>
   </p:cSld>
   <p:clrMapOvr>
@@ -4072,6 +4312,34 @@
           </a:prstGeom>
         </p:spPr>
       </p:pic>
+      <p:sp>
+        <p:nvSpPr>
+          <p:cNvPr id="5" name="Footer Placeholder 4">
+            <a:extLst>
+              <a:ext uri="{FF2B5EF4-FFF2-40B4-BE49-F238E27FC236}">
+                <a16:creationId xmlns:a16="http://schemas.microsoft.com/office/drawing/2014/main" id="{32ACFC11-F709-F87A-4620-4B4A9B625D8F}"/>
+              </a:ext>
+            </a:extLst>
+          </p:cNvPr>
+          <p:cNvSpPr>
+            <a:spLocks noGrp="1"/>
+          </p:cNvSpPr>
+          <p:nvPr>
+            <p:ph type="ftr" sz="quarter" idx="11"/>
+          </p:nvPr>
+        </p:nvSpPr>
+        <p:spPr/>
+        <p:txBody>
+          <a:bodyPr/>
+          <a:lstStyle/>
+          <a:p>
+            <a:r>
+              <a:rPr lang="en-US"/>
+              <a:t>Copyright Peterson &amp; Davie, 2026</a:t>
+            </a:r>
+          </a:p>
+        </p:txBody>
+      </p:sp>
     </p:spTree>
   </p:cSld>
   <p:clrMapOvr>
@@ -4249,6 +4517,34 @@
             <a:r>
               <a:rPr dirty="0"/>
               <a:t>Large transfers: bandwidth-dominated</a:t>
+            </a:r>
+          </a:p>
+        </p:txBody>
+      </p:sp>
+      <p:sp>
+        <p:nvSpPr>
+          <p:cNvPr id="4" name="Footer Placeholder 3">
+            <a:extLst>
+              <a:ext uri="{FF2B5EF4-FFF2-40B4-BE49-F238E27FC236}">
+                <a16:creationId xmlns:a16="http://schemas.microsoft.com/office/drawing/2014/main" id="{9AB5C1B8-97D2-DF79-D24B-436B1DE4B9A2}"/>
+              </a:ext>
+            </a:extLst>
+          </p:cNvPr>
+          <p:cNvSpPr>
+            <a:spLocks noGrp="1"/>
+          </p:cNvSpPr>
+          <p:nvPr>
+            <p:ph type="ftr" sz="quarter" idx="11"/>
+          </p:nvPr>
+        </p:nvSpPr>
+        <p:spPr/>
+        <p:txBody>
+          <a:bodyPr/>
+          <a:lstStyle/>
+          <a:p>
+            <a:r>
+              <a:rPr lang="en-US"/>
+              <a:t>Copyright Peterson &amp; Davie, 2026</a:t>
             </a:r>
           </a:p>
         </p:txBody>
@@ -4466,6 +4762,34 @@
           </a:prstGeom>
         </p:spPr>
       </p:pic>
+      <p:sp>
+        <p:nvSpPr>
+          <p:cNvPr id="6" name="Footer Placeholder 5">
+            <a:extLst>
+              <a:ext uri="{FF2B5EF4-FFF2-40B4-BE49-F238E27FC236}">
+                <a16:creationId xmlns:a16="http://schemas.microsoft.com/office/drawing/2014/main" id="{CEC1121D-601C-97A8-D7A8-CBE72DECA116}"/>
+              </a:ext>
+            </a:extLst>
+          </p:cNvPr>
+          <p:cNvSpPr>
+            <a:spLocks noGrp="1"/>
+          </p:cNvSpPr>
+          <p:nvPr>
+            <p:ph type="ftr" sz="quarter" idx="11"/>
+          </p:nvPr>
+        </p:nvSpPr>
+        <p:spPr/>
+        <p:txBody>
+          <a:bodyPr/>
+          <a:lstStyle/>
+          <a:p>
+            <a:r>
+              <a:rPr lang="en-US"/>
+              <a:t>Copyright Peterson &amp; Davie, 2026</a:t>
+            </a:r>
+          </a:p>
+        </p:txBody>
+      </p:sp>
     </p:spTree>
   </p:cSld>
   <p:clrMapOvr>
@@ -4557,6 +4881,34 @@
           </a:p>
         </p:txBody>
       </p:sp>
+      <p:sp>
+        <p:nvSpPr>
+          <p:cNvPr id="4" name="Footer Placeholder 3">
+            <a:extLst>
+              <a:ext uri="{FF2B5EF4-FFF2-40B4-BE49-F238E27FC236}">
+                <a16:creationId xmlns:a16="http://schemas.microsoft.com/office/drawing/2014/main" id="{912B7993-DB7A-6633-5868-AD16F48E0CAB}"/>
+              </a:ext>
+            </a:extLst>
+          </p:cNvPr>
+          <p:cNvSpPr>
+            <a:spLocks noGrp="1"/>
+          </p:cNvSpPr>
+          <p:nvPr>
+            <p:ph type="ftr" sz="quarter" idx="11"/>
+          </p:nvPr>
+        </p:nvSpPr>
+        <p:spPr/>
+        <p:txBody>
+          <a:bodyPr/>
+          <a:lstStyle/>
+          <a:p>
+            <a:r>
+              <a:rPr lang="en-US"/>
+              <a:t>Copyright Peterson &amp; Davie, 2026</a:t>
+            </a:r>
+          </a:p>
+        </p:txBody>
+      </p:sp>
     </p:spTree>
   </p:cSld>
   <p:clrMapOvr>
@@ -4689,6 +5041,34 @@
           </a:prstGeom>
         </p:spPr>
       </p:pic>
+      <p:sp>
+        <p:nvSpPr>
+          <p:cNvPr id="5" name="Footer Placeholder 4">
+            <a:extLst>
+              <a:ext uri="{FF2B5EF4-FFF2-40B4-BE49-F238E27FC236}">
+                <a16:creationId xmlns:a16="http://schemas.microsoft.com/office/drawing/2014/main" id="{0478F00A-14AB-D910-CBDC-B7E08B6BC18C}"/>
+              </a:ext>
+            </a:extLst>
+          </p:cNvPr>
+          <p:cNvSpPr>
+            <a:spLocks noGrp="1"/>
+          </p:cNvSpPr>
+          <p:nvPr>
+            <p:ph type="ftr" sz="quarter" idx="11"/>
+          </p:nvPr>
+        </p:nvSpPr>
+        <p:spPr/>
+        <p:txBody>
+          <a:bodyPr/>
+          <a:lstStyle/>
+          <a:p>
+            <a:r>
+              <a:rPr lang="en-US"/>
+              <a:t>Copyright Peterson &amp; Davie, 2026</a:t>
+            </a:r>
+          </a:p>
+        </p:txBody>
+      </p:sp>
     </p:spTree>
   </p:cSld>
   <p:clrMapOvr>
@@ -4946,6 +5326,34 @@
           </a:p>
         </p:txBody>
       </p:sp>
+      <p:sp>
+        <p:nvSpPr>
+          <p:cNvPr id="5" name="Footer Placeholder 4">
+            <a:extLst>
+              <a:ext uri="{FF2B5EF4-FFF2-40B4-BE49-F238E27FC236}">
+                <a16:creationId xmlns:a16="http://schemas.microsoft.com/office/drawing/2014/main" id="{331D0D1D-B0BF-4FE9-2C9E-5B67BC15E5E7}"/>
+              </a:ext>
+            </a:extLst>
+          </p:cNvPr>
+          <p:cNvSpPr>
+            <a:spLocks noGrp="1"/>
+          </p:cNvSpPr>
+          <p:nvPr>
+            <p:ph type="ftr" sz="quarter" idx="11"/>
+          </p:nvPr>
+        </p:nvSpPr>
+        <p:spPr/>
+        <p:txBody>
+          <a:bodyPr/>
+          <a:lstStyle/>
+          <a:p>
+            <a:r>
+              <a:rPr lang="en-US"/>
+              <a:t>Copyright Peterson &amp; Davie, 2026</a:t>
+            </a:r>
+          </a:p>
+        </p:txBody>
+      </p:sp>
     </p:spTree>
   </p:cSld>
   <p:clrMapOvr>
@@ -5094,6 +5502,34 @@
           </a:p>
         </p:txBody>
       </p:sp>
+      <p:sp>
+        <p:nvSpPr>
+          <p:cNvPr id="4" name="Footer Placeholder 3">
+            <a:extLst>
+              <a:ext uri="{FF2B5EF4-FFF2-40B4-BE49-F238E27FC236}">
+                <a16:creationId xmlns:a16="http://schemas.microsoft.com/office/drawing/2014/main" id="{AAE162FB-AE6E-6909-7B37-B581B3059674}"/>
+              </a:ext>
+            </a:extLst>
+          </p:cNvPr>
+          <p:cNvSpPr>
+            <a:spLocks noGrp="1"/>
+          </p:cNvSpPr>
+          <p:nvPr>
+            <p:ph type="ftr" sz="quarter" idx="11"/>
+          </p:nvPr>
+        </p:nvSpPr>
+        <p:spPr/>
+        <p:txBody>
+          <a:bodyPr/>
+          <a:lstStyle/>
+          <a:p>
+            <a:r>
+              <a:rPr lang="en-US"/>
+              <a:t>Copyright Peterson &amp; Davie, 2026</a:t>
+            </a:r>
+          </a:p>
+        </p:txBody>
+      </p:sp>
     </p:spTree>
   </p:cSld>
   <p:clrMapOvr>
@@ -5199,6 +5635,34 @@
           </a:prstGeom>
         </p:spPr>
       </p:pic>
+      <p:sp>
+        <p:nvSpPr>
+          <p:cNvPr id="5" name="Footer Placeholder 4">
+            <a:extLst>
+              <a:ext uri="{FF2B5EF4-FFF2-40B4-BE49-F238E27FC236}">
+                <a16:creationId xmlns:a16="http://schemas.microsoft.com/office/drawing/2014/main" id="{D33CE063-F96E-7718-876D-C405EC441E14}"/>
+              </a:ext>
+            </a:extLst>
+          </p:cNvPr>
+          <p:cNvSpPr>
+            <a:spLocks noGrp="1"/>
+          </p:cNvSpPr>
+          <p:nvPr>
+            <p:ph type="ftr" sz="quarter" idx="11"/>
+          </p:nvPr>
+        </p:nvSpPr>
+        <p:spPr/>
+        <p:txBody>
+          <a:bodyPr/>
+          <a:lstStyle/>
+          <a:p>
+            <a:r>
+              <a:rPr lang="en-US"/>
+              <a:t>Copyright Peterson &amp; Davie, 2026</a:t>
+            </a:r>
+          </a:p>
+        </p:txBody>
+      </p:sp>
     </p:spTree>
   </p:cSld>
   <p:clrMapOvr>
@@ -5503,6 +5967,34 @@
           </a:fontRef>
         </p:style>
       </p:cxnSp>
+      <p:sp>
+        <p:nvSpPr>
+          <p:cNvPr id="7" name="Footer Placeholder 6">
+            <a:extLst>
+              <a:ext uri="{FF2B5EF4-FFF2-40B4-BE49-F238E27FC236}">
+                <a16:creationId xmlns:a16="http://schemas.microsoft.com/office/drawing/2014/main" id="{5AFC0070-FFD5-005B-01BA-F5736D074502}"/>
+              </a:ext>
+            </a:extLst>
+          </p:cNvPr>
+          <p:cNvSpPr>
+            <a:spLocks noGrp="1"/>
+          </p:cNvSpPr>
+          <p:nvPr>
+            <p:ph type="ftr" sz="quarter" idx="11"/>
+          </p:nvPr>
+        </p:nvSpPr>
+        <p:spPr/>
+        <p:txBody>
+          <a:bodyPr/>
+          <a:lstStyle/>
+          <a:p>
+            <a:r>
+              <a:rPr lang="en-US"/>
+              <a:t>Copyright Peterson &amp; Davie, 2026</a:t>
+            </a:r>
+          </a:p>
+        </p:txBody>
+      </p:sp>
     </p:spTree>
     <p:extLst>
       <p:ext uri="{BB962C8B-B14F-4D97-AF65-F5344CB8AC3E}">
@@ -5672,6 +6164,34 @@
           </a:prstGeom>
         </p:spPr>
       </p:pic>
+      <p:sp>
+        <p:nvSpPr>
+          <p:cNvPr id="5" name="Footer Placeholder 4">
+            <a:extLst>
+              <a:ext uri="{FF2B5EF4-FFF2-40B4-BE49-F238E27FC236}">
+                <a16:creationId xmlns:a16="http://schemas.microsoft.com/office/drawing/2014/main" id="{809D7038-2B8F-24C7-0FB1-5BA892421E9E}"/>
+              </a:ext>
+            </a:extLst>
+          </p:cNvPr>
+          <p:cNvSpPr>
+            <a:spLocks noGrp="1"/>
+          </p:cNvSpPr>
+          <p:nvPr>
+            <p:ph type="ftr" sz="quarter" idx="11"/>
+          </p:nvPr>
+        </p:nvSpPr>
+        <p:spPr/>
+        <p:txBody>
+          <a:bodyPr/>
+          <a:lstStyle/>
+          <a:p>
+            <a:r>
+              <a:rPr lang="en-US"/>
+              <a:t>Copyright Peterson &amp; Davie, 2026</a:t>
+            </a:r>
+          </a:p>
+        </p:txBody>
+      </p:sp>
     </p:spTree>
   </p:cSld>
   <p:clrMapOvr>
@@ -5850,6 +6370,34 @@
           </a:prstGeom>
         </p:spPr>
       </p:pic>
+      <p:sp>
+        <p:nvSpPr>
+          <p:cNvPr id="6" name="Footer Placeholder 5">
+            <a:extLst>
+              <a:ext uri="{FF2B5EF4-FFF2-40B4-BE49-F238E27FC236}">
+                <a16:creationId xmlns:a16="http://schemas.microsoft.com/office/drawing/2014/main" id="{BFE802C4-10FF-832D-B44D-B419B0299C66}"/>
+              </a:ext>
+            </a:extLst>
+          </p:cNvPr>
+          <p:cNvSpPr>
+            <a:spLocks noGrp="1"/>
+          </p:cNvSpPr>
+          <p:nvPr>
+            <p:ph type="ftr" sz="quarter" idx="11"/>
+          </p:nvPr>
+        </p:nvSpPr>
+        <p:spPr/>
+        <p:txBody>
+          <a:bodyPr/>
+          <a:lstStyle/>
+          <a:p>
+            <a:r>
+              <a:rPr lang="en-US"/>
+              <a:t>Copyright Peterson &amp; Davie, 2026</a:t>
+            </a:r>
+          </a:p>
+        </p:txBody>
+      </p:sp>
     </p:spTree>
   </p:cSld>
   <p:clrMapOvr>
@@ -5996,6 +6544,34 @@
               <a:t>Detect (and optionally “fix”) errors inside the network as an optimization</a:t>
             </a:r>
             <a:endParaRPr dirty="0"/>
+          </a:p>
+        </p:txBody>
+      </p:sp>
+      <p:sp>
+        <p:nvSpPr>
+          <p:cNvPr id="4" name="Footer Placeholder 3">
+            <a:extLst>
+              <a:ext uri="{FF2B5EF4-FFF2-40B4-BE49-F238E27FC236}">
+                <a16:creationId xmlns:a16="http://schemas.microsoft.com/office/drawing/2014/main" id="{7F9E87CE-9212-02DA-534A-379E9EBF87CD}"/>
+              </a:ext>
+            </a:extLst>
+          </p:cNvPr>
+          <p:cNvSpPr>
+            <a:spLocks noGrp="1"/>
+          </p:cNvSpPr>
+          <p:nvPr>
+            <p:ph type="ftr" sz="quarter" idx="11"/>
+          </p:nvPr>
+        </p:nvSpPr>
+        <p:spPr/>
+        <p:txBody>
+          <a:bodyPr/>
+          <a:lstStyle/>
+          <a:p>
+            <a:r>
+              <a:rPr lang="en-US"/>
+              <a:t>Copyright Peterson &amp; Davie, 2026</a:t>
+            </a:r>
           </a:p>
         </p:txBody>
       </p:sp>
